--- a/media/resources/files/Onduktardyn_Orunduk_Maanisi_Tars_Oyunu copy.pptx
+++ b/media/resources/files/Onduktardyn_Orunduk_Maanisi_Tars_Oyunu copy.pptx
@@ -14948,7 +14948,7 @@
                 <a:ea typeface="+mn-ea"/>
                 <a:cs typeface="+mn-cs"/>
               </a:rPr>
-              <a:t>Турдуу пикирлер учун ыраазычылык билдиребиз.</a:t>
+              <a:t>Түрдүү пикирлер үчүн ыраазычылык билдиребиз.</a:t>
             </a:r>
           </a:p>
           <a:p>

--- a/media/resources/files/Onduktardyn_Orunduk_Maanisi_Tars_Oyunu copy.pptx
+++ b/media/resources/files/Onduktardyn_Orunduk_Maanisi_Tars_Oyunu copy.pptx
@@ -4737,7 +4737,7 @@
           <a:p>
             <a:r>
               <a:rPr lang="en-GB" sz="3200" dirty="0"/>
-              <a:t>6.4</a:t>
+              <a:t>6,4</a:t>
             </a:r>
             <a:endParaRPr lang="en-GB" sz="1600" dirty="0"/>
           </a:p>
@@ -4773,7 +4773,7 @@
           <a:p>
             <a:r>
               <a:rPr lang="en-GB" sz="3600" dirty="0"/>
-              <a:t>0.47</a:t>
+              <a:t>0,47</a:t>
             </a:r>
             <a:endParaRPr lang="en-GB" dirty="0"/>
           </a:p>
@@ -4809,7 +4809,7 @@
           <a:p>
             <a:r>
               <a:rPr lang="en-GB" sz="4400" dirty="0"/>
-              <a:t>7.06</a:t>
+              <a:t>7,06</a:t>
             </a:r>
             <a:endParaRPr lang="en-GB" sz="2400" dirty="0"/>
           </a:p>
@@ -4845,7 +4845,7 @@
           <a:p>
             <a:r>
               <a:rPr lang="en-GB" sz="3600" dirty="0"/>
-              <a:t>2.081</a:t>
+              <a:t>2,081</a:t>
             </a:r>
             <a:endParaRPr lang="en-GB" dirty="0"/>
           </a:p>
@@ -4881,7 +4881,7 @@
           <a:p>
             <a:r>
               <a:rPr lang="en-GB" sz="4400" dirty="0"/>
-              <a:t>0.24</a:t>
+              <a:t>0,24</a:t>
             </a:r>
             <a:endParaRPr lang="en-GB" sz="2400" dirty="0"/>
           </a:p>
@@ -4917,7 +4917,7 @@
           <a:p>
             <a:r>
               <a:rPr lang="en-GB" sz="3600" dirty="0"/>
-              <a:t>0.054</a:t>
+              <a:t>0,054</a:t>
             </a:r>
             <a:endParaRPr lang="en-GB" dirty="0"/>
           </a:p>
@@ -4953,7 +4953,7 @@
           <a:p>
             <a:r>
               <a:rPr lang="en-GB" sz="4400" dirty="0"/>
-              <a:t>7.101</a:t>
+              <a:t>7,101</a:t>
             </a:r>
             <a:endParaRPr lang="en-GB" sz="2400" dirty="0"/>
           </a:p>
@@ -4989,7 +4989,7 @@
           <a:p>
             <a:r>
               <a:rPr lang="en-GB" sz="3200" dirty="0"/>
-              <a:t>4.104</a:t>
+              <a:t>4,104</a:t>
             </a:r>
             <a:endParaRPr lang="en-GB" sz="1600" dirty="0"/>
           </a:p>
@@ -5025,7 +5025,7 @@
           <a:p>
             <a:r>
               <a:rPr lang="en-GB" sz="3600" dirty="0"/>
-              <a:t>0.125</a:t>
+              <a:t>0,125</a:t>
             </a:r>
             <a:endParaRPr lang="en-GB" dirty="0"/>
           </a:p>
@@ -5061,7 +5061,7 @@
           <a:p>
             <a:r>
               <a:rPr lang="en-GB" sz="4400" dirty="0"/>
-              <a:t>6.0307</a:t>
+              <a:t>6,0307</a:t>
             </a:r>
             <a:endParaRPr lang="en-GB" sz="2400" dirty="0"/>
           </a:p>
@@ -5097,7 +5097,7 @@
           <a:p>
             <a:r>
               <a:rPr lang="en-GB" sz="3200" dirty="0"/>
-              <a:t>0.8717</a:t>
+              <a:t>0,8717</a:t>
             </a:r>
             <a:endParaRPr lang="en-GB" sz="1600" dirty="0"/>
           </a:p>
@@ -5133,7 +5133,7 @@
           <a:p>
             <a:r>
               <a:rPr lang="en-GB" sz="3600" dirty="0"/>
-              <a:t>1.26</a:t>
+              <a:t>1,26</a:t>
             </a:r>
             <a:endParaRPr lang="en-GB" dirty="0"/>
           </a:p>
@@ -5169,7 +5169,7 @@
           <a:p>
             <a:r>
               <a:rPr lang="en-GB" sz="4400" dirty="0"/>
-              <a:t>6.25</a:t>
+              <a:t>6,25</a:t>
             </a:r>
             <a:endParaRPr lang="en-GB" sz="2400" dirty="0"/>
           </a:p>
@@ -5205,7 +5205,7 @@
           <a:p>
             <a:r>
               <a:rPr lang="en-GB" sz="3600" dirty="0"/>
-              <a:t>3.012</a:t>
+              <a:t>3,012</a:t>
             </a:r>
             <a:endParaRPr lang="en-GB" dirty="0"/>
           </a:p>
@@ -5241,7 +5241,7 @@
           <a:p>
             <a:r>
               <a:rPr lang="en-GB" sz="4000" dirty="0"/>
-              <a:t>6.4</a:t>
+              <a:t>6,4</a:t>
             </a:r>
             <a:endParaRPr lang="en-GB" sz="2000" dirty="0"/>
           </a:p>
@@ -5277,7 +5277,7 @@
           <a:p>
             <a:r>
               <a:rPr lang="en-GB" sz="3600" dirty="0"/>
-              <a:t>0.47</a:t>
+              <a:t>0,47</a:t>
             </a:r>
             <a:endParaRPr lang="en-GB" dirty="0"/>
           </a:p>
@@ -5313,7 +5313,7 @@
           <a:p>
             <a:r>
               <a:rPr lang="en-GB" sz="3600" dirty="0"/>
-              <a:t>7.06</a:t>
+              <a:t>7,06</a:t>
             </a:r>
             <a:endParaRPr lang="en-GB" dirty="0"/>
           </a:p>
@@ -5349,7 +5349,7 @@
           <a:p>
             <a:r>
               <a:rPr lang="en-GB" sz="3600" dirty="0"/>
-              <a:t>2.081</a:t>
+              <a:t>2,081</a:t>
             </a:r>
             <a:endParaRPr lang="en-GB" dirty="0"/>
           </a:p>
@@ -5385,7 +5385,7 @@
           <a:p>
             <a:r>
               <a:rPr lang="en-GB" sz="4400" dirty="0"/>
-              <a:t>0.24</a:t>
+              <a:t>0,24</a:t>
             </a:r>
             <a:endParaRPr lang="en-GB" sz="2400" dirty="0"/>
           </a:p>
@@ -5421,7 +5421,7 @@
           <a:p>
             <a:r>
               <a:rPr lang="en-GB" sz="3600" dirty="0"/>
-              <a:t>0.054</a:t>
+              <a:t>0,054</a:t>
             </a:r>
             <a:endParaRPr lang="en-GB" dirty="0"/>
           </a:p>
@@ -5457,7 +5457,7 @@
           <a:p>
             <a:r>
               <a:rPr lang="en-GB" sz="3600" dirty="0"/>
-              <a:t>7.101</a:t>
+              <a:t>7,101</a:t>
             </a:r>
             <a:endParaRPr lang="en-GB" dirty="0"/>
           </a:p>
@@ -5493,7 +5493,7 @@
           <a:p>
             <a:r>
               <a:rPr lang="en-GB" sz="2400" dirty="0"/>
-              <a:t>4.104</a:t>
+              <a:t>4,104</a:t>
             </a:r>
             <a:endParaRPr lang="en-GB" sz="1200" dirty="0"/>
           </a:p>
@@ -5529,7 +5529,7 @@
           <a:p>
             <a:r>
               <a:rPr lang="en-GB" sz="3600" dirty="0"/>
-              <a:t>0.125</a:t>
+              <a:t>0,125</a:t>
             </a:r>
             <a:endParaRPr lang="en-GB" dirty="0"/>
           </a:p>
@@ -5565,7 +5565,7 @@
           <a:p>
             <a:r>
               <a:rPr lang="en-GB" sz="3600" dirty="0"/>
-              <a:t>6.0307</a:t>
+              <a:t>6,0307</a:t>
             </a:r>
             <a:endParaRPr lang="en-GB" dirty="0"/>
           </a:p>
@@ -5601,7 +5601,7 @@
           <a:p>
             <a:r>
               <a:rPr lang="en-GB" sz="4000" dirty="0"/>
-              <a:t>0.8717</a:t>
+              <a:t>0,8717</a:t>
             </a:r>
             <a:endParaRPr lang="en-GB" sz="2000" dirty="0"/>
           </a:p>
@@ -5637,7 +5637,7 @@
           <a:p>
             <a:r>
               <a:rPr lang="en-GB" sz="4000" dirty="0"/>
-              <a:t>1.26</a:t>
+              <a:t>1,26</a:t>
             </a:r>
             <a:endParaRPr lang="en-GB" sz="2000" dirty="0"/>
           </a:p>
@@ -5673,7 +5673,7 @@
           <a:p>
             <a:r>
               <a:rPr lang="en-GB" sz="5400" dirty="0"/>
-              <a:t>6.25</a:t>
+              <a:t>6,25</a:t>
             </a:r>
             <a:endParaRPr lang="en-GB" sz="3200" dirty="0"/>
           </a:p>
@@ -5709,7 +5709,7 @@
           <a:p>
             <a:r>
               <a:rPr lang="en-GB" sz="3600" dirty="0"/>
-              <a:t>3.012</a:t>
+              <a:t>3,012</a:t>
             </a:r>
             <a:endParaRPr lang="en-GB" dirty="0"/>
           </a:p>
@@ -6199,7 +6199,7 @@
           <a:p>
             <a:r>
               <a:rPr lang="en-GB" sz="3200" dirty="0"/>
-              <a:t>7.2</a:t>
+              <a:t>7,2</a:t>
             </a:r>
             <a:endParaRPr lang="en-GB" sz="1600" dirty="0"/>
           </a:p>
@@ -6235,7 +6235,7 @@
           <a:p>
             <a:r>
               <a:rPr lang="en-GB" sz="4000" dirty="0"/>
-              <a:t>0.72</a:t>
+              <a:t>0,72</a:t>
             </a:r>
             <a:endParaRPr lang="en-GB" sz="2000" dirty="0"/>
           </a:p>
@@ -6271,7 +6271,7 @@
           <a:p>
             <a:r>
               <a:rPr lang="en-GB" sz="3200" dirty="0"/>
-              <a:t>2.04</a:t>
+              <a:t>2,04</a:t>
             </a:r>
             <a:endParaRPr lang="en-GB" sz="1600" dirty="0"/>
           </a:p>
@@ -6307,7 +6307,7 @@
           <a:p>
             <a:r>
               <a:rPr lang="en-GB" sz="2800" dirty="0"/>
-              <a:t>6.747</a:t>
+              <a:t>6,747</a:t>
             </a:r>
             <a:endParaRPr lang="en-GB" sz="1400" dirty="0"/>
           </a:p>
@@ -6343,7 +6343,7 @@
           <a:p>
             <a:r>
               <a:rPr lang="en-GB" sz="3200" dirty="0"/>
-              <a:t>0.007</a:t>
+              <a:t>0,007</a:t>
             </a:r>
             <a:endParaRPr lang="en-GB" sz="1600" dirty="0"/>
           </a:p>
@@ -6379,7 +6379,7 @@
           <a:p>
             <a:r>
               <a:rPr lang="en-GB" sz="4000" dirty="0"/>
-              <a:t>4.02</a:t>
+              <a:t>4,02</a:t>
             </a:r>
             <a:endParaRPr lang="en-GB" sz="2000" dirty="0"/>
           </a:p>
@@ -6415,7 +6415,7 @@
           <a:p>
             <a:r>
               <a:rPr lang="en-GB" sz="3200" dirty="0"/>
-              <a:t>6.128</a:t>
+              <a:t>6,128</a:t>
             </a:r>
             <a:endParaRPr lang="en-GB" sz="1600" dirty="0"/>
           </a:p>
@@ -6451,7 +6451,7 @@
           <a:p>
             <a:r>
               <a:rPr lang="en-GB" sz="4000" dirty="0"/>
-              <a:t>7.57</a:t>
+              <a:t>7,57</a:t>
             </a:r>
             <a:endParaRPr lang="en-GB" sz="2000" dirty="0"/>
           </a:p>
@@ -6487,7 +6487,7 @@
           <a:p>
             <a:r>
               <a:rPr lang="en-GB" sz="4000" dirty="0"/>
-              <a:t>0.271</a:t>
+              <a:t>0,271</a:t>
             </a:r>
             <a:endParaRPr lang="en-GB" sz="2000" dirty="0"/>
           </a:p>
@@ -6523,7 +6523,7 @@
           <a:p>
             <a:r>
               <a:rPr lang="en-GB" sz="4000" dirty="0"/>
-              <a:t>1.406</a:t>
+              <a:t>1,406</a:t>
             </a:r>
             <a:endParaRPr lang="en-GB" sz="2000" dirty="0"/>
           </a:p>
@@ -6559,7 +6559,7 @@
           <a:p>
             <a:r>
               <a:rPr lang="en-GB" sz="3200" dirty="0"/>
-              <a:t>5.202</a:t>
+              <a:t>5,202</a:t>
             </a:r>
             <a:endParaRPr lang="en-GB" sz="1600" dirty="0"/>
           </a:p>
@@ -6595,7 +6595,7 @@
           <a:p>
             <a:r>
               <a:rPr lang="en-GB" sz="4000" dirty="0"/>
-              <a:t>0.6627</a:t>
+              <a:t>0,6627</a:t>
             </a:r>
             <a:endParaRPr lang="en-GB" sz="2000" dirty="0"/>
           </a:p>
@@ -6631,7 +6631,7 @@
           <a:p>
             <a:r>
               <a:rPr lang="en-GB" sz="2800" dirty="0"/>
-              <a:t>0.1078</a:t>
+              <a:t>0,1078</a:t>
             </a:r>
             <a:endParaRPr lang="en-GB" sz="1400" dirty="0"/>
           </a:p>
@@ -6667,7 +6667,7 @@
           <a:p>
             <a:r>
               <a:rPr lang="en-GB" sz="3200" dirty="0"/>
-              <a:t>2.786</a:t>
+              <a:t>2,786</a:t>
             </a:r>
             <a:endParaRPr lang="en-GB" sz="1600" dirty="0"/>
           </a:p>
@@ -6703,7 +6703,7 @@
           <a:p>
             <a:r>
               <a:rPr lang="en-GB" sz="2800" dirty="0"/>
-              <a:t>4.317</a:t>
+              <a:t>4,317</a:t>
             </a:r>
             <a:endParaRPr lang="en-GB" sz="1400" dirty="0"/>
           </a:p>
@@ -6739,7 +6739,7 @@
           <a:p>
             <a:r>
               <a:rPr lang="en-GB" sz="4000" dirty="0"/>
-              <a:t>7.2168</a:t>
+              <a:t>7,2168</a:t>
             </a:r>
             <a:endParaRPr lang="en-GB" sz="2000" dirty="0"/>
           </a:p>
@@ -6775,7 +6775,7 @@
           <a:p>
             <a:r>
               <a:rPr lang="en-GB" sz="3200" dirty="0"/>
-              <a:t>0.6378</a:t>
+              <a:t>0,6378</a:t>
             </a:r>
             <a:endParaRPr lang="en-GB" sz="1600" dirty="0"/>
           </a:p>
@@ -6811,7 +6811,7 @@
           <a:p>
             <a:r>
               <a:rPr lang="en-GB" sz="4000" dirty="0"/>
-              <a:t>7.2</a:t>
+              <a:t>7,2</a:t>
             </a:r>
             <a:endParaRPr lang="en-GB" sz="2000" dirty="0"/>
           </a:p>
@@ -6847,7 +6847,7 @@
           <a:p>
             <a:r>
               <a:rPr lang="en-GB" sz="2800" dirty="0"/>
-              <a:t>0.72</a:t>
+              <a:t>0,72</a:t>
             </a:r>
             <a:endParaRPr lang="en-GB" sz="1400" dirty="0"/>
           </a:p>
@@ -6883,7 +6883,7 @@
           <a:p>
             <a:r>
               <a:rPr lang="en-GB" sz="4000" dirty="0"/>
-              <a:t>2.04</a:t>
+              <a:t>2,04</a:t>
             </a:r>
             <a:endParaRPr lang="en-GB" sz="2000" dirty="0"/>
           </a:p>
@@ -6919,7 +6919,7 @@
           <a:p>
             <a:r>
               <a:rPr lang="en-GB" sz="3200" dirty="0"/>
-              <a:t>6.747</a:t>
+              <a:t>6,747</a:t>
             </a:r>
             <a:endParaRPr lang="en-GB" sz="1600" dirty="0"/>
           </a:p>
@@ -6955,7 +6955,7 @@
           <a:p>
             <a:r>
               <a:rPr lang="en-GB" sz="3200" dirty="0"/>
-              <a:t>0.007</a:t>
+              <a:t>0,007</a:t>
             </a:r>
             <a:endParaRPr lang="en-GB" sz="1600" dirty="0"/>
           </a:p>
@@ -6991,7 +6991,7 @@
           <a:p>
             <a:r>
               <a:rPr lang="en-GB" sz="2800" dirty="0"/>
-              <a:t>4.02</a:t>
+              <a:t>4,02</a:t>
             </a:r>
             <a:endParaRPr lang="en-GB" sz="1400" dirty="0"/>
           </a:p>
@@ -7027,7 +7027,7 @@
           <a:p>
             <a:r>
               <a:rPr lang="en-GB" sz="3200" dirty="0"/>
-              <a:t>6.128</a:t>
+              <a:t>6,128</a:t>
             </a:r>
             <a:endParaRPr lang="en-GB" sz="1600" dirty="0"/>
           </a:p>
@@ -7063,7 +7063,7 @@
           <a:p>
             <a:r>
               <a:rPr lang="en-GB" sz="3200" dirty="0"/>
-              <a:t>7.57</a:t>
+              <a:t>7,57</a:t>
             </a:r>
             <a:endParaRPr lang="en-GB" sz="1600" dirty="0"/>
           </a:p>
@@ -7099,7 +7099,7 @@
           <a:p>
             <a:r>
               <a:rPr lang="en-GB" sz="4000" dirty="0"/>
-              <a:t>0.271</a:t>
+              <a:t>0,271</a:t>
             </a:r>
             <a:endParaRPr lang="en-GB" sz="2000" dirty="0"/>
           </a:p>
@@ -7135,7 +7135,7 @@
           <a:p>
             <a:r>
               <a:rPr lang="en-GB" sz="2800" dirty="0"/>
-              <a:t>1.406</a:t>
+              <a:t>1,406</a:t>
             </a:r>
             <a:endParaRPr lang="en-GB" sz="1400" dirty="0"/>
           </a:p>
@@ -7171,7 +7171,7 @@
           <a:p>
             <a:r>
               <a:rPr lang="en-GB" sz="3200" dirty="0"/>
-              <a:t>5.202</a:t>
+              <a:t>5,202</a:t>
             </a:r>
             <a:endParaRPr lang="en-GB" sz="1600" dirty="0"/>
           </a:p>
@@ -7207,7 +7207,7 @@
           <a:p>
             <a:r>
               <a:rPr lang="en-GB" sz="4400" dirty="0"/>
-              <a:t>0.6627</a:t>
+              <a:t>0,6627</a:t>
             </a:r>
             <a:endParaRPr lang="en-GB" sz="2400" dirty="0"/>
           </a:p>
@@ -7243,7 +7243,7 @@
           <a:p>
             <a:r>
               <a:rPr lang="en-GB" sz="3200" dirty="0"/>
-              <a:t>0.1078</a:t>
+              <a:t>0,1078</a:t>
             </a:r>
             <a:endParaRPr lang="en-GB" sz="1600" dirty="0"/>
           </a:p>
@@ -7279,7 +7279,7 @@
           <a:p>
             <a:r>
               <a:rPr lang="en-GB" sz="4000" dirty="0"/>
-              <a:t>2.786</a:t>
+              <a:t>2,786</a:t>
             </a:r>
             <a:endParaRPr lang="en-GB" sz="2000" dirty="0"/>
           </a:p>
@@ -7315,7 +7315,7 @@
           <a:p>
             <a:r>
               <a:rPr lang="en-GB" sz="3200" dirty="0"/>
-              <a:t>4.317</a:t>
+              <a:t>4,317</a:t>
             </a:r>
             <a:endParaRPr lang="en-GB" sz="1600" dirty="0"/>
           </a:p>
@@ -7351,7 +7351,7 @@
           <a:p>
             <a:r>
               <a:rPr lang="en-GB" sz="2800" dirty="0"/>
-              <a:t>7.2168</a:t>
+              <a:t>7,2168</a:t>
             </a:r>
             <a:endParaRPr lang="en-GB" sz="1400" dirty="0"/>
           </a:p>
@@ -7387,7 +7387,7 @@
           <a:p>
             <a:r>
               <a:rPr lang="en-GB" sz="4000" dirty="0"/>
-              <a:t>0.6378</a:t>
+              <a:t>0,6378</a:t>
             </a:r>
             <a:endParaRPr lang="en-GB" sz="2000" dirty="0"/>
           </a:p>
